--- a/examples/pm11_title_filename/title_filename_merged.pptx
+++ b/examples/pm11_title_filename/title_filename_merged.pptx
@@ -771,7 +771,7 @@
     </p:spTree>
     <p:extLst>
       <p:ext uri="{BB962C8B-B14F-4D97-AF65-F5344CB8AC3E}">
-        <p14:creationId xmlns:p14="http://schemas.microsoft.com/office/powerpoint/2010/main" val="4007446798"/>
+        <p14:creationId xmlns:p14="http://schemas.microsoft.com/office/powerpoint/2010/main" val="3568359796"/>
       </p:ext>
     </p:extLst>
   </p:cSld>
@@ -879,7 +879,7 @@
     </p:spTree>
     <p:extLst>
       <p:ext uri="{BB962C8B-B14F-4D97-AF65-F5344CB8AC3E}">
-        <p14:creationId xmlns:p14="http://schemas.microsoft.com/office/powerpoint/2010/main" val="40371642"/>
+        <p14:creationId xmlns:p14="http://schemas.microsoft.com/office/powerpoint/2010/main" val="2529715123"/>
       </p:ext>
     </p:extLst>
   </p:cSld>
@@ -4318,7 +4318,7 @@
     </p:spTree>
     <p:extLst>
       <p:ext uri="{BB962C8B-B14F-4D97-AF65-F5344CB8AC3E}">
-        <p14:creationId xmlns:p14="http://schemas.microsoft.com/office/powerpoint/2010/main" val="1934596175"/>
+        <p14:creationId xmlns:p14="http://schemas.microsoft.com/office/powerpoint/2010/main" val="1413353470"/>
       </p:ext>
     </p:extLst>
   </p:cSld>
@@ -4571,7 +4571,7 @@
           <p:nvPr>
             <p:extLst>
               <p:ext uri="{D42A27DB-BD31-4B8C-83A1-F6EECF244321}">
-                <p14:modId xmlns:p14="http://schemas.microsoft.com/office/powerpoint/2010/main" val="4038597881"/>
+                <p14:modId xmlns:p14="http://schemas.microsoft.com/office/powerpoint/2010/main" val="3508756629"/>
               </p:ext>
             </p:extLst>
           </p:nvPr>
@@ -4925,7 +4925,7 @@
     </p:spTree>
     <p:extLst>
       <p:ext uri="{BB962C8B-B14F-4D97-AF65-F5344CB8AC3E}">
-        <p14:creationId xmlns:p14="http://schemas.microsoft.com/office/powerpoint/2010/main" val="2281961191"/>
+        <p14:creationId xmlns:p14="http://schemas.microsoft.com/office/powerpoint/2010/main" val="1924301452"/>
       </p:ext>
     </p:extLst>
   </p:cSld>

--- a/examples/pm11_title_filename/title_filename_merged.pptx
+++ b/examples/pm11_title_filename/title_filename_merged.pptx
@@ -239,7 +239,7 @@
           <a:p>
             <a:fld id="{294670BC-B8C6-44A7-84E1-23632D8FD86F}" type="datetimeFigureOut">
               <a:rPr kumimoji="1" lang="ja-JP" altLang="en-US" smtClean="0"/>
-              <a:t>2026/6/4</a:t>
+              <a:t>2026/6/6</a:t>
             </a:fld>
             <a:endParaRPr kumimoji="1" lang="ja-JP" altLang="en-US"/>
           </a:p>
@@ -771,7 +771,7 @@
     </p:spTree>
     <p:extLst>
       <p:ext uri="{BB962C8B-B14F-4D97-AF65-F5344CB8AC3E}">
-        <p14:creationId xmlns:p14="http://schemas.microsoft.com/office/powerpoint/2010/main" val="3568359796"/>
+        <p14:creationId xmlns:p14="http://schemas.microsoft.com/office/powerpoint/2010/main" val="1627821326"/>
       </p:ext>
     </p:extLst>
   </p:cSld>
@@ -879,7 +879,7 @@
     </p:spTree>
     <p:extLst>
       <p:ext uri="{BB962C8B-B14F-4D97-AF65-F5344CB8AC3E}">
-        <p14:creationId xmlns:p14="http://schemas.microsoft.com/office/powerpoint/2010/main" val="2529715123"/>
+        <p14:creationId xmlns:p14="http://schemas.microsoft.com/office/powerpoint/2010/main" val="1223834144"/>
       </p:ext>
     </p:extLst>
   </p:cSld>
@@ -4318,7 +4318,7 @@
     </p:spTree>
     <p:extLst>
       <p:ext uri="{BB962C8B-B14F-4D97-AF65-F5344CB8AC3E}">
-        <p14:creationId xmlns:p14="http://schemas.microsoft.com/office/powerpoint/2010/main" val="1413353470"/>
+        <p14:creationId xmlns:p14="http://schemas.microsoft.com/office/powerpoint/2010/main" val="3319547086"/>
       </p:ext>
     </p:extLst>
   </p:cSld>
@@ -4571,7 +4571,7 @@
           <p:nvPr>
             <p:extLst>
               <p:ext uri="{D42A27DB-BD31-4B8C-83A1-F6EECF244321}">
-                <p14:modId xmlns:p14="http://schemas.microsoft.com/office/powerpoint/2010/main" val="3508756629"/>
+                <p14:modId xmlns:p14="http://schemas.microsoft.com/office/powerpoint/2010/main" val="1810545553"/>
               </p:ext>
             </p:extLst>
           </p:nvPr>
@@ -4925,7 +4925,7 @@
     </p:spTree>
     <p:extLst>
       <p:ext uri="{BB962C8B-B14F-4D97-AF65-F5344CB8AC3E}">
-        <p14:creationId xmlns:p14="http://schemas.microsoft.com/office/powerpoint/2010/main" val="1924301452"/>
+        <p14:creationId xmlns:p14="http://schemas.microsoft.com/office/powerpoint/2010/main" val="339876155"/>
       </p:ext>
     </p:extLst>
   </p:cSld>
